--- a/examples/ppt/tables/tables-rows-cols.pptx
+++ b/examples/ppt/tables/tables-rows-cols.pptx
@@ -5,10 +5,10 @@
     <p:sldMasterId xmlns:r="http://schemas.openxmlformats.org/officeDocument/2006/relationships" id="2147483648" r:id="rId1"/>
   </p:sldMasterIdLst>
   <p:sldIdLst>
-    <p:sldId id="256" r:id="Rdc2e96e8722e4ff6"/>
-    <p:sldId id="257" r:id="R56264edf8f7c46bf"/>
-    <p:sldId id="258" r:id="R2dddacbfdb5b4af2"/>
-    <p:sldId id="259" r:id="R29ec507a1a28424c"/>
+    <p:sldId id="256" r:id="R959b71ad1bfe4c32"/>
+    <p:sldId id="257" r:id="R4b94a99236e841b9"/>
+    <p:sldId id="258" r:id="Rde5262c1cb1048e0"/>
+    <p:sldId id="259" r:id="Ra4dea63664d94c2f"/>
   </p:sldIdLst>
   <p:sldSz cx="12192000" cy="6858000"/>
   <p:notesSz cx="6858000" cy="9144000"/>
@@ -283,7 +283,7 @@
 </file>
 
 <file path=ppt/slideMasters/slideMaster1.xml><?xml version="1.0" encoding="utf-8"?>
-<p:sldMaster xmlns:p="http://schemas.openxmlformats.org/presentationml/2006/main">
+<p:sldMaster xmlns:r="http://schemas.openxmlformats.org/officeDocument/2006/relationships" xmlns:p="http://schemas.openxmlformats.org/presentationml/2006/main">
   <p:cSld>
     <p:spTree>
       <p:nvGrpSpPr>
@@ -306,7 +306,7 @@
 </file>
 
 <file path=ppt/slides/slide1.xml><?xml version="1.0" encoding="utf-8"?>
-<p:sld xmlns:a="http://schemas.openxmlformats.org/drawingml/2006/main" xmlns:p="http://schemas.openxmlformats.org/presentationml/2006/main">
+<p:sld xmlns:p="http://schemas.openxmlformats.org/presentationml/2006/main">
   <p:cSld>
     <p:spTree>
       <p:nvGrpSpPr>
@@ -317,8 +317,8 @@
       <p:grpSpPr/>
       <p:sp>
         <p:nvSpPr>
-          <p:cNvPr id="10000" name="TextBox 1"/>
-          <p:cNvSpPr/>
+          <p:cNvPr id="100000" name="TextBox 1"/>
+          <p:cNvSpPr txBox="1"/>
           <p:nvPr/>
         </p:nvSpPr>
         <p:spPr>
@@ -329,11 +329,6 @@
           <a:prstGeom xmlns:a="http://schemas.openxmlformats.org/drawingml/2006/main" prst="rect">
             <a:avLst/>
           </a:prstGeom>
-          <a:ln xmlns:a="http://schemas.openxmlformats.org/drawingml/2006/main" w="9525">
-            <a:solidFill>
-              <a:srgbClr val="595959"/>
-            </a:solidFill>
-          </a:ln>
         </p:spPr>
         <p:txBody>
           <a:bodyPr xmlns:a="http://schemas.openxmlformats.org/drawingml/2006/main"/>
@@ -348,8 +343,8 @@
       </p:sp>
       <p:sp>
         <p:nvSpPr>
-          <p:cNvPr id="10001" name="TextBox 2"/>
-          <p:cNvSpPr/>
+          <p:cNvPr id="100001" name="TextBox 2"/>
+          <p:cNvSpPr txBox="1"/>
           <p:nvPr/>
         </p:nvSpPr>
         <p:spPr>
@@ -360,11 +355,6 @@
           <a:prstGeom xmlns:a="http://schemas.openxmlformats.org/drawingml/2006/main" prst="rect">
             <a:avLst/>
           </a:prstGeom>
-          <a:ln xmlns:a="http://schemas.openxmlformats.org/drawingml/2006/main" w="9525">
-            <a:solidFill>
-              <a:srgbClr val="595959"/>
-            </a:solidFill>
-          </a:ln>
         </p:spPr>
         <p:txBody>
           <a:bodyPr xmlns:a="http://schemas.openxmlformats.org/drawingml/2006/main"/>
@@ -379,7 +369,7 @@
       </p:sp>
       <p:graphicFrame>
         <p:nvGraphicFramePr>
-          <p:cNvPr id="10002" name="Table 1"/>
+          <p:cNvPr id="100002" name="Table 1"/>
           <p:cNvGraphicFramePr/>
           <p:nvPr/>
         </p:nvGraphicFramePr>
@@ -621,8 +611,8 @@
       </p:graphicFrame>
       <p:sp>
         <p:nvSpPr>
-          <p:cNvPr id="10003" name="TextBox 3"/>
-          <p:cNvSpPr/>
+          <p:cNvPr id="100003" name="TextBox 3"/>
+          <p:cNvSpPr txBox="1"/>
           <p:nvPr/>
         </p:nvSpPr>
         <p:spPr>
@@ -633,11 +623,6 @@
           <a:prstGeom xmlns:a="http://schemas.openxmlformats.org/drawingml/2006/main" prst="rect">
             <a:avLst/>
           </a:prstGeom>
-          <a:ln xmlns:a="http://schemas.openxmlformats.org/drawingml/2006/main" w="9525">
-            <a:solidFill>
-              <a:srgbClr val="595959"/>
-            </a:solidFill>
-          </a:ln>
         </p:spPr>
         <p:txBody>
           <a:bodyPr xmlns:a="http://schemas.openxmlformats.org/drawingml/2006/main"/>
@@ -652,7 +637,7 @@
       </p:sp>
       <p:graphicFrame>
         <p:nvGraphicFramePr>
-          <p:cNvPr id="10004" name="Table 2"/>
+          <p:cNvPr id="100004" name="Table 2"/>
           <p:cNvGraphicFramePr/>
           <p:nvPr/>
         </p:nvGraphicFramePr>
@@ -968,7 +953,7 @@
 </file>
 
 <file path=ppt/slides/slide2.xml><?xml version="1.0" encoding="utf-8"?>
-<p:sld xmlns:a="http://schemas.openxmlformats.org/drawingml/2006/main" xmlns:p="http://schemas.openxmlformats.org/presentationml/2006/main">
+<p:sld xmlns:p="http://schemas.openxmlformats.org/presentationml/2006/main">
   <p:cSld>
     <p:spTree>
       <p:nvGrpSpPr>
@@ -979,8 +964,8 @@
       <p:grpSpPr/>
       <p:sp>
         <p:nvSpPr>
-          <p:cNvPr id="10005" name="TextBox 1"/>
-          <p:cNvSpPr/>
+          <p:cNvPr id="100005" name="TextBox 1"/>
+          <p:cNvSpPr txBox="1"/>
           <p:nvPr/>
         </p:nvSpPr>
         <p:spPr>
@@ -991,11 +976,6 @@
           <a:prstGeom xmlns:a="http://schemas.openxmlformats.org/drawingml/2006/main" prst="rect">
             <a:avLst/>
           </a:prstGeom>
-          <a:ln xmlns:a="http://schemas.openxmlformats.org/drawingml/2006/main" w="9525">
-            <a:solidFill>
-              <a:srgbClr val="595959"/>
-            </a:solidFill>
-          </a:ln>
         </p:spPr>
         <p:txBody>
           <a:bodyPr xmlns:a="http://schemas.openxmlformats.org/drawingml/2006/main"/>
@@ -1010,13 +990,13 @@
       </p:sp>
       <p:graphicFrame>
         <p:nvGraphicFramePr>
-          <p:cNvPr id="10006" name="Table 1"/>
+          <p:cNvPr id="100006" name="Table 1"/>
           <p:cNvGraphicFramePr/>
           <p:nvPr/>
         </p:nvGraphicFramePr>
         <p:xfrm>
           <a:off xmlns:a="http://schemas.openxmlformats.org/drawingml/2006/main" x="457200" y="1097280"/>
-          <a:ext xmlns:a="http://schemas.openxmlformats.org/drawingml/2006/main" cx="10972800" cy="3657600"/>
+          <a:ext xmlns:a="http://schemas.openxmlformats.org/drawingml/2006/main" cx="10972800" cy="3291840"/>
         </p:xfrm>
         <a:graphic xmlns:a="http://schemas.openxmlformats.org/drawingml/2006/main">
           <a:graphicData uri="http://schemas.openxmlformats.org/drawingml/2006/table">
@@ -1034,6 +1014,7 @@
                     <a:bodyPr/>
                     <a:lstStyle/>
                     <a:p>
+                      <a:pPr algn="ctr"/>
                       <a:r>
                         <a:rPr lang="en-US" b="1">
                           <a:solidFill>
@@ -1055,6 +1036,7 @@
                     <a:bodyPr/>
                     <a:lstStyle/>
                     <a:p>
+                      <a:pPr algn="ctr"/>
                       <a:r>
                         <a:rPr lang="en-US" b="1">
                           <a:solidFill>
@@ -1076,6 +1058,7 @@
                     <a:bodyPr/>
                     <a:lstStyle/>
                     <a:p>
+                      <a:pPr algn="ctr"/>
                       <a:r>
                         <a:rPr lang="en-US" b="1">
                           <a:solidFill>
@@ -1097,6 +1080,7 @@
                     <a:bodyPr/>
                     <a:lstStyle/>
                     <a:p>
+                      <a:pPr algn="ctr"/>
                       <a:r>
                         <a:rPr lang="en-US" b="1">
                           <a:solidFill>
@@ -1286,7 +1270,7 @@
 </file>
 
 <file path=ppt/slides/slide3.xml><?xml version="1.0" encoding="utf-8"?>
-<p:sld xmlns:a="http://schemas.openxmlformats.org/drawingml/2006/main" xmlns:p="http://schemas.openxmlformats.org/presentationml/2006/main">
+<p:sld xmlns:p="http://schemas.openxmlformats.org/presentationml/2006/main">
   <p:cSld>
     <p:spTree>
       <p:nvGrpSpPr>
@@ -1297,8 +1281,8 @@
       <p:grpSpPr/>
       <p:sp>
         <p:nvSpPr>
-          <p:cNvPr id="10007" name="TextBox 1"/>
-          <p:cNvSpPr/>
+          <p:cNvPr id="100007" name="TextBox 1"/>
+          <p:cNvSpPr txBox="1"/>
           <p:nvPr/>
         </p:nvSpPr>
         <p:spPr>
@@ -1309,11 +1293,6 @@
           <a:prstGeom xmlns:a="http://schemas.openxmlformats.org/drawingml/2006/main" prst="rect">
             <a:avLst/>
           </a:prstGeom>
-          <a:ln xmlns:a="http://schemas.openxmlformats.org/drawingml/2006/main" w="9525">
-            <a:solidFill>
-              <a:srgbClr val="595959"/>
-            </a:solidFill>
-          </a:ln>
         </p:spPr>
         <p:txBody>
           <a:bodyPr xmlns:a="http://schemas.openxmlformats.org/drawingml/2006/main"/>
@@ -1328,7 +1307,7 @@
       </p:sp>
       <p:graphicFrame>
         <p:nvGraphicFramePr>
-          <p:cNvPr id="10008" name="Table 1"/>
+          <p:cNvPr id="100008" name="Table 1"/>
           <p:cNvGraphicFramePr/>
           <p:nvPr/>
         </p:nvGraphicFramePr>
@@ -1620,7 +1599,7 @@
 </file>
 
 <file path=ppt/slides/slide4.xml><?xml version="1.0" encoding="utf-8"?>
-<p:sld xmlns:a="http://schemas.openxmlformats.org/drawingml/2006/main" xmlns:p="http://schemas.openxmlformats.org/presentationml/2006/main">
+<p:sld xmlns:p="http://schemas.openxmlformats.org/presentationml/2006/main">
   <p:cSld>
     <p:spTree>
       <p:nvGrpSpPr>
@@ -1631,8 +1610,8 @@
       <p:grpSpPr/>
       <p:sp>
         <p:nvSpPr>
-          <p:cNvPr id="10009" name="TextBox 1"/>
-          <p:cNvSpPr/>
+          <p:cNvPr id="100009" name="TextBox 1"/>
+          <p:cNvSpPr txBox="1"/>
           <p:nvPr/>
         </p:nvSpPr>
         <p:spPr>
@@ -1643,11 +1622,6 @@
           <a:prstGeom xmlns:a="http://schemas.openxmlformats.org/drawingml/2006/main" prst="rect">
             <a:avLst/>
           </a:prstGeom>
-          <a:ln xmlns:a="http://schemas.openxmlformats.org/drawingml/2006/main" w="9525">
-            <a:solidFill>
-              <a:srgbClr val="595959"/>
-            </a:solidFill>
-          </a:ln>
         </p:spPr>
         <p:txBody>
           <a:bodyPr xmlns:a="http://schemas.openxmlformats.org/drawingml/2006/main"/>
@@ -1662,8 +1636,8 @@
       </p:sp>
       <p:sp>
         <p:nvSpPr>
-          <p:cNvPr id="10010" name="TextBox 2"/>
-          <p:cNvSpPr/>
+          <p:cNvPr id="100010" name="TextBox 2"/>
+          <p:cNvSpPr txBox="1"/>
           <p:nvPr/>
         </p:nvSpPr>
         <p:spPr>
@@ -1674,11 +1648,6 @@
           <a:prstGeom xmlns:a="http://schemas.openxmlformats.org/drawingml/2006/main" prst="rect">
             <a:avLst/>
           </a:prstGeom>
-          <a:ln xmlns:a="http://schemas.openxmlformats.org/drawingml/2006/main" w="9525">
-            <a:solidFill>
-              <a:srgbClr val="595959"/>
-            </a:solidFill>
-          </a:ln>
         </p:spPr>
         <p:txBody>
           <a:bodyPr xmlns:a="http://schemas.openxmlformats.org/drawingml/2006/main"/>
@@ -1693,7 +1662,7 @@
       </p:sp>
       <p:graphicFrame>
         <p:nvGraphicFramePr>
-          <p:cNvPr id="10011" name="Table 1"/>
+          <p:cNvPr id="100011" name="Table 1"/>
           <p:cNvGraphicFramePr/>
           <p:nvPr/>
         </p:nvGraphicFramePr>
@@ -1890,8 +1859,8 @@
       </p:graphicFrame>
       <p:sp>
         <p:nvSpPr>
-          <p:cNvPr id="10012" name="TextBox 3"/>
-          <p:cNvSpPr/>
+          <p:cNvPr id="100012" name="TextBox 3"/>
+          <p:cNvSpPr txBox="1"/>
           <p:nvPr/>
         </p:nvSpPr>
         <p:spPr>
@@ -1902,11 +1871,6 @@
           <a:prstGeom xmlns:a="http://schemas.openxmlformats.org/drawingml/2006/main" prst="rect">
             <a:avLst/>
           </a:prstGeom>
-          <a:ln xmlns:a="http://schemas.openxmlformats.org/drawingml/2006/main" w="9525">
-            <a:solidFill>
-              <a:srgbClr val="595959"/>
-            </a:solidFill>
-          </a:ln>
         </p:spPr>
         <p:txBody>
           <a:bodyPr xmlns:a="http://schemas.openxmlformats.org/drawingml/2006/main"/>
@@ -1921,7 +1885,7 @@
       </p:sp>
       <p:graphicFrame>
         <p:nvGraphicFramePr>
-          <p:cNvPr id="10013" name="Table 2"/>
+          <p:cNvPr id="100013" name="Table 2"/>
           <p:cNvGraphicFramePr/>
           <p:nvPr/>
         </p:nvGraphicFramePr>
